--- a/marketing/adversaria-story/output/adversaria-story-short.pptx
+++ b/marketing/adversaria-story/output/adversaria-story-short.pptx
@@ -2,16 +2,16 @@
 <file path=ppt/presentation.xml><?xml version="1.0" encoding="utf-8"?>
 <p:presentation xmlns:p="http://schemas.openxmlformats.org/presentationml/2006/main">
   <p:sldMasterIdLst>
-    <p:sldMasterId xmlns:r="http://schemas.openxmlformats.org/officeDocument/2006/relationships" id="2147483648" r:id="R26959cc4182842c4"/>
+    <p:sldMasterId xmlns:r="http://schemas.openxmlformats.org/officeDocument/2006/relationships" id="2147483648" r:id="R36eb96a42c2f4d08"/>
   </p:sldMasterIdLst>
   <p:notesMasterIdLst>
-    <p:notesMasterId xmlns:r="http://schemas.openxmlformats.org/officeDocument/2006/relationships" r:id="R61580f2948cc4d5c"/>
+    <p:notesMasterId xmlns:r="http://schemas.openxmlformats.org/officeDocument/2006/relationships" r:id="R0a231dbc167a4736"/>
   </p:notesMasterIdLst>
   <p:sldIdLst>
-    <p:sldId xmlns:r="http://schemas.openxmlformats.org/officeDocument/2006/relationships" id="256" r:id="R62ecfbde04b5458b"/>
-    <p:sldId xmlns:r="http://schemas.openxmlformats.org/officeDocument/2006/relationships" id="257" r:id="R147c2200066748d0"/>
-    <p:sldId xmlns:r="http://schemas.openxmlformats.org/officeDocument/2006/relationships" id="258" r:id="Rad138efdf1f24c47"/>
-    <p:sldId xmlns:r="http://schemas.openxmlformats.org/officeDocument/2006/relationships" id="259" r:id="Rf2aeacf4c8c843d5"/>
+    <p:sldId xmlns:r="http://schemas.openxmlformats.org/officeDocument/2006/relationships" id="256" r:id="R512b06a0b8624bfe"/>
+    <p:sldId xmlns:r="http://schemas.openxmlformats.org/officeDocument/2006/relationships" id="257" r:id="R8b085302da5846dd"/>
+    <p:sldId xmlns:r="http://schemas.openxmlformats.org/officeDocument/2006/relationships" id="258" r:id="R69e8e5529cea4fdd"/>
+    <p:sldId xmlns:r="http://schemas.openxmlformats.org/officeDocument/2006/relationships" id="259" r:id="R8d70e73e24c84e65"/>
   </p:sldIdLst>
   <p:sldSz cx="15240000" cy="8572500"/>
   <p:notesSz cx="6858000" cy="9144000"/>
@@ -763,7 +763,7 @@
   </p:cSld>
   <p:clrMap bg1="lt1" tx1="dk1" bg2="lt2" tx2="dk2" accent1="accent1" accent2="accent2" accent3="accent3" accent4="accent4" accent5="accent5" accent6="accent6" hlink="hlink" folHlink="folHlink"/>
   <p:sldLayoutIdLst>
-    <p:sldLayoutId xmlns:r="http://schemas.openxmlformats.org/officeDocument/2006/relationships" id="2147483649" r:id="Rcf4795ffe6344c1f"/>
+    <p:sldLayoutId xmlns:r="http://schemas.openxmlformats.org/officeDocument/2006/relationships" id="2147483649" r:id="R4f14d3e8d5374b7f"/>
   </p:sldLayoutIdLst>
   <p:txStyles>
     <p:titleStyle>
@@ -1314,7 +1314,7 @@
           <p:cNvPr id="10" name="Laghari Labs frame">
             <a:extLst xmlns:a="http://schemas.openxmlformats.org/drawingml/2006/main">
               <a:ext uri="{FF2B5EF4-FFF2-40B4-BE49-F238E27FC236}">
-                <a16:creationId xmlns:a16="http://schemas.microsoft.com/office/drawing/2014/main" id="{5E717E25-0DA6-47E8-9EB8-DCF2FF342EE4}"/>
+                <a16:creationId xmlns:a16="http://schemas.microsoft.com/office/drawing/2014/main" id="{824ABE56-2827-404B-8A9F-F7B090B02B3C}"/>
               </a:ext>
             </a:extLst>
           </p:cNvPr>
@@ -1344,7 +1344,7 @@
           <p:cNvPr id="2" name="Editable text 0">
             <a:extLst xmlns:a="http://schemas.openxmlformats.org/drawingml/2006/main">
               <a:ext uri="{FF2B5EF4-FFF2-40B4-BE49-F238E27FC236}">
-                <a16:creationId xmlns:a16="http://schemas.microsoft.com/office/drawing/2014/main" id="{5D600E06-ED8D-440D-A611-610A7D51BC46}"/>
+                <a16:creationId xmlns:a16="http://schemas.microsoft.com/office/drawing/2014/main" id="{2718D11A-6185-4A4A-9EDA-8B2D2CD60914}"/>
               </a:ext>
             </a:extLst>
           </p:cNvPr>
@@ -1405,7 +1405,7 @@
           <p:cNvPr id="3" name="Editable text 1">
             <a:extLst xmlns:a="http://schemas.openxmlformats.org/drawingml/2006/main">
               <a:ext uri="{FF2B5EF4-FFF2-40B4-BE49-F238E27FC236}">
-                <a16:creationId xmlns:a16="http://schemas.microsoft.com/office/drawing/2014/main" id="{258124EB-1225-4BB0-AF45-68A9EE7B546F}"/>
+                <a16:creationId xmlns:a16="http://schemas.microsoft.com/office/drawing/2014/main" id="{089518E5-8AA9-405D-A7A6-32009BEBE92D}"/>
               </a:ext>
             </a:extLst>
           </p:cNvPr>
@@ -1466,7 +1466,7 @@
           <p:cNvPr id="4" name="Editable text 2">
             <a:extLst xmlns:a="http://schemas.openxmlformats.org/drawingml/2006/main">
               <a:ext uri="{FF2B5EF4-FFF2-40B4-BE49-F238E27FC236}">
-                <a16:creationId xmlns:a16="http://schemas.microsoft.com/office/drawing/2014/main" id="{7A3B835A-EB3E-4D4D-90DA-587EE42A0712}"/>
+                <a16:creationId xmlns:a16="http://schemas.microsoft.com/office/drawing/2014/main" id="{5DA30F5E-B32E-451C-9F06-472D8167CFA5}"/>
               </a:ext>
             </a:extLst>
           </p:cNvPr>
@@ -1527,7 +1527,7 @@
           <p:cNvPr id="5" name="Brand highlight 3">
             <a:extLst xmlns:a="http://schemas.openxmlformats.org/drawingml/2006/main">
               <a:ext uri="{FF2B5EF4-FFF2-40B4-BE49-F238E27FC236}">
-                <a16:creationId xmlns:a16="http://schemas.microsoft.com/office/drawing/2014/main" id="{B158D748-07B9-4BDC-A65E-C5F712A26F66}"/>
+                <a16:creationId xmlns:a16="http://schemas.microsoft.com/office/drawing/2014/main" id="{BEE26D18-9A12-4A0C-B796-CCE9A231A3CF}"/>
               </a:ext>
             </a:extLst>
           </p:cNvPr>
@@ -1557,7 +1557,7 @@
           <p:cNvPr id="6" name="Brand highlight 4">
             <a:extLst xmlns:a="http://schemas.openxmlformats.org/drawingml/2006/main">
               <a:ext uri="{FF2B5EF4-FFF2-40B4-BE49-F238E27FC236}">
-                <a16:creationId xmlns:a16="http://schemas.microsoft.com/office/drawing/2014/main" id="{4001E8E7-4F0E-4882-8350-C076340141A6}"/>
+                <a16:creationId xmlns:a16="http://schemas.microsoft.com/office/drawing/2014/main" id="{6FEDCA0E-6CC3-4755-96CF-6452FAFB7839}"/>
               </a:ext>
             </a:extLst>
           </p:cNvPr>
@@ -1589,7 +1589,7 @@
           <p:cNvPr id="7" name="Editable text 5">
             <a:extLst xmlns:a="http://schemas.openxmlformats.org/drawingml/2006/main">
               <a:ext uri="{FF2B5EF4-FFF2-40B4-BE49-F238E27FC236}">
-                <a16:creationId xmlns:a16="http://schemas.microsoft.com/office/drawing/2014/main" id="{E0AF6D7C-50AB-4BCB-8CEA-766CC48E17E2}"/>
+                <a16:creationId xmlns:a16="http://schemas.microsoft.com/office/drawing/2014/main" id="{FE6A2CE8-6B70-4864-8013-0C92E261F1A9}"/>
               </a:ext>
             </a:extLst>
           </p:cNvPr>
@@ -1650,7 +1650,7 @@
           <p:cNvPr id="8" name="Editable text 6">
             <a:extLst xmlns:a="http://schemas.openxmlformats.org/drawingml/2006/main">
               <a:ext uri="{FF2B5EF4-FFF2-40B4-BE49-F238E27FC236}">
-                <a16:creationId xmlns:a16="http://schemas.microsoft.com/office/drawing/2014/main" id="{F8B0FDF9-DAB8-49EE-97CD-EE42C256A0A0}"/>
+                <a16:creationId xmlns:a16="http://schemas.microsoft.com/office/drawing/2014/main" id="{F021CD9C-BAE1-4DB2-951A-1C76FD701E3F}"/>
               </a:ext>
             </a:extLst>
           </p:cNvPr>
@@ -1701,7 +1701,7 @@
                 <a:ea typeface="Silkscreen"/>
                 <a:cs typeface="Silkscreen"/>
               </a:rPr>
-              <a:t>LaghariLabs.io</a:t>
+              <a:t>LaghariLabs.com</a:t>
             </a:r>
           </a:p>
         </p:txBody>
@@ -1711,7 +1711,7 @@
           <p:cNvPr id="9" name="Editable text 7">
             <a:extLst xmlns:a="http://schemas.openxmlformats.org/drawingml/2006/main">
               <a:ext uri="{FF2B5EF4-FFF2-40B4-BE49-F238E27FC236}">
-                <a16:creationId xmlns:a16="http://schemas.microsoft.com/office/drawing/2014/main" id="{9D4A3731-1FEF-4065-8680-C386F9E73386}"/>
+                <a16:creationId xmlns:a16="http://schemas.microsoft.com/office/drawing/2014/main" id="{4F6CBCDE-3E3B-48E6-8907-51B0FD469D82}"/>
               </a:ext>
             </a:extLst>
           </p:cNvPr>
@@ -1770,7 +1770,7 @@
     </p:spTree>
     <p:extLst>
       <p:ext uri="{BB962C8B-B14F-4D97-AF65-F5344CB8AC3E}">
-        <p14:creationId xmlns:p14="http://schemas.microsoft.com/office/powerpoint/2010/main" val="755333072"/>
+        <p14:creationId xmlns:p14="http://schemas.microsoft.com/office/powerpoint/2010/main" val="1487583861"/>
       </p:ext>
     </p:extLst>
   </p:cSld>
@@ -1801,7 +1801,7 @@
           <p:cNvPr id="8" name="Laghari Labs frame">
             <a:extLst xmlns:a="http://schemas.openxmlformats.org/drawingml/2006/main">
               <a:ext uri="{FF2B5EF4-FFF2-40B4-BE49-F238E27FC236}">
-                <a16:creationId xmlns:a16="http://schemas.microsoft.com/office/drawing/2014/main" id="{B9A464CD-EE00-49B7-B5D0-A0C7447E54DA}"/>
+                <a16:creationId xmlns:a16="http://schemas.microsoft.com/office/drawing/2014/main" id="{1921E2D1-6815-4DA1-8059-5A95F0DE4A52}"/>
               </a:ext>
             </a:extLst>
           </p:cNvPr>
@@ -1831,7 +1831,7 @@
           <p:cNvPr id="2" name="Editable text 0">
             <a:extLst xmlns:a="http://schemas.openxmlformats.org/drawingml/2006/main">
               <a:ext uri="{FF2B5EF4-FFF2-40B4-BE49-F238E27FC236}">
-                <a16:creationId xmlns:a16="http://schemas.microsoft.com/office/drawing/2014/main" id="{88F5D913-5DD3-4443-8B4C-6AC37379226A}"/>
+                <a16:creationId xmlns:a16="http://schemas.microsoft.com/office/drawing/2014/main" id="{515F4246-EC12-4104-886A-960FE5CBB375}"/>
               </a:ext>
             </a:extLst>
           </p:cNvPr>
@@ -1892,7 +1892,7 @@
           <p:cNvPr id="3" name="Editable text 1">
             <a:extLst xmlns:a="http://schemas.openxmlformats.org/drawingml/2006/main">
               <a:ext uri="{FF2B5EF4-FFF2-40B4-BE49-F238E27FC236}">
-                <a16:creationId xmlns:a16="http://schemas.microsoft.com/office/drawing/2014/main" id="{87A622B9-DAB4-4C2E-85F7-F81984113688}"/>
+                <a16:creationId xmlns:a16="http://schemas.microsoft.com/office/drawing/2014/main" id="{C7F57514-8D9F-4865-A497-93977A89ED48}"/>
               </a:ext>
             </a:extLst>
           </p:cNvPr>
@@ -1953,7 +1953,7 @@
           <p:cNvPr id="4" name="Editable text 2">
             <a:extLst xmlns:a="http://schemas.openxmlformats.org/drawingml/2006/main">
               <a:ext uri="{FF2B5EF4-FFF2-40B4-BE49-F238E27FC236}">
-                <a16:creationId xmlns:a16="http://schemas.microsoft.com/office/drawing/2014/main" id="{9B952B7C-9A67-45AF-918E-B61FECC24CC3}"/>
+                <a16:creationId xmlns:a16="http://schemas.microsoft.com/office/drawing/2014/main" id="{10254E06-8236-439C-AA84-489EF31E58E5}"/>
               </a:ext>
             </a:extLst>
           </p:cNvPr>
@@ -2014,7 +2014,7 @@
           <p:cNvPr id="5" name="Editable text 3">
             <a:extLst xmlns:a="http://schemas.openxmlformats.org/drawingml/2006/main">
               <a:ext uri="{FF2B5EF4-FFF2-40B4-BE49-F238E27FC236}">
-                <a16:creationId xmlns:a16="http://schemas.microsoft.com/office/drawing/2014/main" id="{120505AA-ACC6-4E19-A8A6-98DFA96A0619}"/>
+                <a16:creationId xmlns:a16="http://schemas.microsoft.com/office/drawing/2014/main" id="{CEC00E5E-5D84-4E54-9C09-386B3183D109}"/>
               </a:ext>
             </a:extLst>
           </p:cNvPr>
@@ -2075,7 +2075,7 @@
           <p:cNvPr id="6" name="Editable text 4">
             <a:extLst xmlns:a="http://schemas.openxmlformats.org/drawingml/2006/main">
               <a:ext uri="{FF2B5EF4-FFF2-40B4-BE49-F238E27FC236}">
-                <a16:creationId xmlns:a16="http://schemas.microsoft.com/office/drawing/2014/main" id="{E2CEC77E-CE03-4628-84EA-D1232B2AB445}"/>
+                <a16:creationId xmlns:a16="http://schemas.microsoft.com/office/drawing/2014/main" id="{98A0A085-A644-4298-AC1E-E944EDC057AA}"/>
               </a:ext>
             </a:extLst>
           </p:cNvPr>
@@ -2126,7 +2126,7 @@
                 <a:ea typeface="Silkscreen"/>
                 <a:cs typeface="Silkscreen"/>
               </a:rPr>
-              <a:t>LaghariLabs.io</a:t>
+              <a:t>LaghariLabs.com</a:t>
             </a:r>
           </a:p>
         </p:txBody>
@@ -2136,7 +2136,7 @@
           <p:cNvPr id="7" name="Editable text 5">
             <a:extLst xmlns:a="http://schemas.openxmlformats.org/drawingml/2006/main">
               <a:ext uri="{FF2B5EF4-FFF2-40B4-BE49-F238E27FC236}">
-                <a16:creationId xmlns:a16="http://schemas.microsoft.com/office/drawing/2014/main" id="{2872B4FF-024B-4A5D-9D72-3BF8E0D205B1}"/>
+                <a16:creationId xmlns:a16="http://schemas.microsoft.com/office/drawing/2014/main" id="{7D23A3F8-F1A9-42C2-B812-1458D14FB1CE}"/>
               </a:ext>
             </a:extLst>
           </p:cNvPr>
@@ -2195,7 +2195,7 @@
     </p:spTree>
     <p:extLst>
       <p:ext uri="{BB962C8B-B14F-4D97-AF65-F5344CB8AC3E}">
-        <p14:creationId xmlns:p14="http://schemas.microsoft.com/office/powerpoint/2010/main" val="293463722"/>
+        <p14:creationId xmlns:p14="http://schemas.microsoft.com/office/powerpoint/2010/main" val="1092705668"/>
       </p:ext>
     </p:extLst>
   </p:cSld>
@@ -2226,7 +2226,7 @@
           <p:cNvPr id="10" name="Laghari Labs frame">
             <a:extLst xmlns:a="http://schemas.openxmlformats.org/drawingml/2006/main">
               <a:ext uri="{FF2B5EF4-FFF2-40B4-BE49-F238E27FC236}">
-                <a16:creationId xmlns:a16="http://schemas.microsoft.com/office/drawing/2014/main" id="{A4C38A76-CF77-493D-8112-16248F491782}"/>
+                <a16:creationId xmlns:a16="http://schemas.microsoft.com/office/drawing/2014/main" id="{0DB1CBF9-F901-4513-95E1-28C9DA8DA513}"/>
               </a:ext>
             </a:extLst>
           </p:cNvPr>
@@ -2256,7 +2256,7 @@
           <p:cNvPr id="2" name="Editable text 0">
             <a:extLst xmlns:a="http://schemas.openxmlformats.org/drawingml/2006/main">
               <a:ext uri="{FF2B5EF4-FFF2-40B4-BE49-F238E27FC236}">
-                <a16:creationId xmlns:a16="http://schemas.microsoft.com/office/drawing/2014/main" id="{15632D7E-7E3E-47EC-B07A-087C69CE73FF}"/>
+                <a16:creationId xmlns:a16="http://schemas.microsoft.com/office/drawing/2014/main" id="{B465C54A-ADB4-4A05-83E4-A5B5A6E2405C}"/>
               </a:ext>
             </a:extLst>
           </p:cNvPr>
@@ -2317,7 +2317,7 @@
           <p:cNvPr id="3" name="Editable text 1">
             <a:extLst xmlns:a="http://schemas.openxmlformats.org/drawingml/2006/main">
               <a:ext uri="{FF2B5EF4-FFF2-40B4-BE49-F238E27FC236}">
-                <a16:creationId xmlns:a16="http://schemas.microsoft.com/office/drawing/2014/main" id="{A9D21FDC-E999-4A40-A190-E9CEAF0990B6}"/>
+                <a16:creationId xmlns:a16="http://schemas.microsoft.com/office/drawing/2014/main" id="{AA86C7BD-CAAF-4D9B-A60A-B26D1B9FB244}"/>
               </a:ext>
             </a:extLst>
           </p:cNvPr>
@@ -2378,7 +2378,7 @@
           <p:cNvPr id="4" name="Editable text 2">
             <a:extLst xmlns:a="http://schemas.openxmlformats.org/drawingml/2006/main">
               <a:ext uri="{FF2B5EF4-FFF2-40B4-BE49-F238E27FC236}">
-                <a16:creationId xmlns:a16="http://schemas.microsoft.com/office/drawing/2014/main" id="{CA2480FC-BFDE-4375-873B-63F9EEF14330}"/>
+                <a16:creationId xmlns:a16="http://schemas.microsoft.com/office/drawing/2014/main" id="{0DC64BBC-58F3-47A7-8D2C-D24F86BE1BA7}"/>
               </a:ext>
             </a:extLst>
           </p:cNvPr>
@@ -2439,7 +2439,7 @@
           <p:cNvPr id="5" name="Brand highlight 3">
             <a:extLst xmlns:a="http://schemas.openxmlformats.org/drawingml/2006/main">
               <a:ext uri="{FF2B5EF4-FFF2-40B4-BE49-F238E27FC236}">
-                <a16:creationId xmlns:a16="http://schemas.microsoft.com/office/drawing/2014/main" id="{532EB853-6368-4DE2-B007-A35BCD3678EE}"/>
+                <a16:creationId xmlns:a16="http://schemas.microsoft.com/office/drawing/2014/main" id="{9A1D82D4-BB5B-4935-8A09-264FDF7E09E9}"/>
               </a:ext>
             </a:extLst>
           </p:cNvPr>
@@ -2469,7 +2469,7 @@
           <p:cNvPr id="6" name="Brand highlight 4">
             <a:extLst xmlns:a="http://schemas.openxmlformats.org/drawingml/2006/main">
               <a:ext uri="{FF2B5EF4-FFF2-40B4-BE49-F238E27FC236}">
-                <a16:creationId xmlns:a16="http://schemas.microsoft.com/office/drawing/2014/main" id="{360C7E1D-01EC-4F2B-9A34-3B7513CA86C2}"/>
+                <a16:creationId xmlns:a16="http://schemas.microsoft.com/office/drawing/2014/main" id="{57739E50-6E6F-4B25-AC05-296FEB87F38B}"/>
               </a:ext>
             </a:extLst>
           </p:cNvPr>
@@ -2501,7 +2501,7 @@
           <p:cNvPr id="7" name="Editable text 5">
             <a:extLst xmlns:a="http://schemas.openxmlformats.org/drawingml/2006/main">
               <a:ext uri="{FF2B5EF4-FFF2-40B4-BE49-F238E27FC236}">
-                <a16:creationId xmlns:a16="http://schemas.microsoft.com/office/drawing/2014/main" id="{95C694B6-4D52-48EE-B25D-6B913497E950}"/>
+                <a16:creationId xmlns:a16="http://schemas.microsoft.com/office/drawing/2014/main" id="{EEBF910C-62F2-4E2C-8CA9-9BD23D67F424}"/>
               </a:ext>
             </a:extLst>
           </p:cNvPr>
@@ -2562,7 +2562,7 @@
           <p:cNvPr id="8" name="Editable text 6">
             <a:extLst xmlns:a="http://schemas.openxmlformats.org/drawingml/2006/main">
               <a:ext uri="{FF2B5EF4-FFF2-40B4-BE49-F238E27FC236}">
-                <a16:creationId xmlns:a16="http://schemas.microsoft.com/office/drawing/2014/main" id="{500F6488-C8E7-4DE8-97DE-6FAE898A9D22}"/>
+                <a16:creationId xmlns:a16="http://schemas.microsoft.com/office/drawing/2014/main" id="{48C374A4-1FAE-4C10-A2B5-DB0441C498E5}"/>
               </a:ext>
             </a:extLst>
           </p:cNvPr>
@@ -2613,7 +2613,7 @@
                 <a:ea typeface="Silkscreen"/>
                 <a:cs typeface="Silkscreen"/>
               </a:rPr>
-              <a:t>LaghariLabs.io</a:t>
+              <a:t>LaghariLabs.com</a:t>
             </a:r>
           </a:p>
         </p:txBody>
@@ -2623,7 +2623,7 @@
           <p:cNvPr id="9" name="Editable text 7">
             <a:extLst xmlns:a="http://schemas.openxmlformats.org/drawingml/2006/main">
               <a:ext uri="{FF2B5EF4-FFF2-40B4-BE49-F238E27FC236}">
-                <a16:creationId xmlns:a16="http://schemas.microsoft.com/office/drawing/2014/main" id="{297B7482-E557-4689-877C-9766D0477A55}"/>
+                <a16:creationId xmlns:a16="http://schemas.microsoft.com/office/drawing/2014/main" id="{442783A8-AF42-45ED-A0A3-08B305319675}"/>
               </a:ext>
             </a:extLst>
           </p:cNvPr>
@@ -2682,7 +2682,7 @@
     </p:spTree>
     <p:extLst>
       <p:ext uri="{BB962C8B-B14F-4D97-AF65-F5344CB8AC3E}">
-        <p14:creationId xmlns:p14="http://schemas.microsoft.com/office/powerpoint/2010/main" val="1651682048"/>
+        <p14:creationId xmlns:p14="http://schemas.microsoft.com/office/powerpoint/2010/main" val="1123461738"/>
       </p:ext>
     </p:extLst>
   </p:cSld>
@@ -2713,7 +2713,7 @@
           <p:cNvPr id="10" name="Laghari Labs frame">
             <a:extLst xmlns:a="http://schemas.openxmlformats.org/drawingml/2006/main">
               <a:ext uri="{FF2B5EF4-FFF2-40B4-BE49-F238E27FC236}">
-                <a16:creationId xmlns:a16="http://schemas.microsoft.com/office/drawing/2014/main" id="{B3ADFF07-676C-42C4-B5E4-90F8B2E7D83B}"/>
+                <a16:creationId xmlns:a16="http://schemas.microsoft.com/office/drawing/2014/main" id="{E689D413-1ED5-412E-852C-743F4C5CF322}"/>
               </a:ext>
             </a:extLst>
           </p:cNvPr>
@@ -2743,7 +2743,7 @@
           <p:cNvPr id="2" name="Editable text 0">
             <a:extLst xmlns:a="http://schemas.openxmlformats.org/drawingml/2006/main">
               <a:ext uri="{FF2B5EF4-FFF2-40B4-BE49-F238E27FC236}">
-                <a16:creationId xmlns:a16="http://schemas.microsoft.com/office/drawing/2014/main" id="{6D06B968-B2C5-463D-BDE8-029AB4058CE3}"/>
+                <a16:creationId xmlns:a16="http://schemas.microsoft.com/office/drawing/2014/main" id="{CE923081-3E14-4C4A-AAD4-E8DACCCA1F8B}"/>
               </a:ext>
             </a:extLst>
           </p:cNvPr>
@@ -2804,7 +2804,7 @@
           <p:cNvPr id="3" name="Editable text 1">
             <a:extLst xmlns:a="http://schemas.openxmlformats.org/drawingml/2006/main">
               <a:ext uri="{FF2B5EF4-FFF2-40B4-BE49-F238E27FC236}">
-                <a16:creationId xmlns:a16="http://schemas.microsoft.com/office/drawing/2014/main" id="{5B83BB6F-F1B8-47C2-8523-FCDA42C767D5}"/>
+                <a16:creationId xmlns:a16="http://schemas.microsoft.com/office/drawing/2014/main" id="{2A7A04C9-03E7-45AF-AF15-AAD0C687BCF6}"/>
               </a:ext>
             </a:extLst>
           </p:cNvPr>
@@ -2865,7 +2865,7 @@
           <p:cNvPr id="4" name="Editable text 2">
             <a:extLst xmlns:a="http://schemas.openxmlformats.org/drawingml/2006/main">
               <a:ext uri="{FF2B5EF4-FFF2-40B4-BE49-F238E27FC236}">
-                <a16:creationId xmlns:a16="http://schemas.microsoft.com/office/drawing/2014/main" id="{121CA23D-EAC0-4C13-AA31-D30EC8625CA2}"/>
+                <a16:creationId xmlns:a16="http://schemas.microsoft.com/office/drawing/2014/main" id="{5F643D57-0D3D-4D5B-B739-6A9484250895}"/>
               </a:ext>
             </a:extLst>
           </p:cNvPr>
@@ -2926,7 +2926,7 @@
           <p:cNvPr id="5" name="Editable text 3">
             <a:extLst xmlns:a="http://schemas.openxmlformats.org/drawingml/2006/main">
               <a:ext uri="{FF2B5EF4-FFF2-40B4-BE49-F238E27FC236}">
-                <a16:creationId xmlns:a16="http://schemas.microsoft.com/office/drawing/2014/main" id="{C9DE7BA4-A7D0-4092-8967-88909D12977C}"/>
+                <a16:creationId xmlns:a16="http://schemas.microsoft.com/office/drawing/2014/main" id="{FCBA4B7E-C571-42B0-AADF-70293A03DF92}"/>
               </a:ext>
             </a:extLst>
           </p:cNvPr>
@@ -2987,7 +2987,7 @@
           <p:cNvPr id="6" name="Editable text 4">
             <a:extLst xmlns:a="http://schemas.openxmlformats.org/drawingml/2006/main">
               <a:ext uri="{FF2B5EF4-FFF2-40B4-BE49-F238E27FC236}">
-                <a16:creationId xmlns:a16="http://schemas.microsoft.com/office/drawing/2014/main" id="{42E7F2EC-0C64-409B-B20B-6190D359C65E}"/>
+                <a16:creationId xmlns:a16="http://schemas.microsoft.com/office/drawing/2014/main" id="{BADBDCF3-734F-4A03-9EB3-A4CA927C152B}"/>
               </a:ext>
             </a:extLst>
           </p:cNvPr>
@@ -3048,7 +3048,7 @@
           <p:cNvPr id="7" name="Editable text 5">
             <a:extLst xmlns:a="http://schemas.openxmlformats.org/drawingml/2006/main">
               <a:ext uri="{FF2B5EF4-FFF2-40B4-BE49-F238E27FC236}">
-                <a16:creationId xmlns:a16="http://schemas.microsoft.com/office/drawing/2014/main" id="{2668373C-532C-412B-AB9B-3EA1316E59CF}"/>
+                <a16:creationId xmlns:a16="http://schemas.microsoft.com/office/drawing/2014/main" id="{BCD05F15-C922-4099-82BA-A2E0B50599B6}"/>
               </a:ext>
             </a:extLst>
           </p:cNvPr>
@@ -3109,7 +3109,7 @@
           <p:cNvPr id="8" name="Editable text 6">
             <a:extLst xmlns:a="http://schemas.openxmlformats.org/drawingml/2006/main">
               <a:ext uri="{FF2B5EF4-FFF2-40B4-BE49-F238E27FC236}">
-                <a16:creationId xmlns:a16="http://schemas.microsoft.com/office/drawing/2014/main" id="{BFAC3C1E-7A35-4322-9E80-CFEA12F3184E}"/>
+                <a16:creationId xmlns:a16="http://schemas.microsoft.com/office/drawing/2014/main" id="{904C19D6-0A5D-4F1F-A091-951673866DB0}"/>
               </a:ext>
             </a:extLst>
           </p:cNvPr>
@@ -3160,7 +3160,7 @@
                 <a:ea typeface="Silkscreen"/>
                 <a:cs typeface="Silkscreen"/>
               </a:rPr>
-              <a:t>LaghariLabs.io</a:t>
+              <a:t>LaghariLabs.com</a:t>
             </a:r>
           </a:p>
         </p:txBody>
@@ -3170,7 +3170,7 @@
           <p:cNvPr id="9" name="Editable text 7">
             <a:extLst xmlns:a="http://schemas.openxmlformats.org/drawingml/2006/main">
               <a:ext uri="{FF2B5EF4-FFF2-40B4-BE49-F238E27FC236}">
-                <a16:creationId xmlns:a16="http://schemas.microsoft.com/office/drawing/2014/main" id="{2F4E76D3-056D-4EBF-93E5-592CB15618E2}"/>
+                <a16:creationId xmlns:a16="http://schemas.microsoft.com/office/drawing/2014/main" id="{99E17612-8F30-4042-859F-889213496CA0}"/>
               </a:ext>
             </a:extLst>
           </p:cNvPr>
@@ -3229,7 +3229,7 @@
     </p:spTree>
     <p:extLst>
       <p:ext uri="{BB962C8B-B14F-4D97-AF65-F5344CB8AC3E}">
-        <p14:creationId xmlns:p14="http://schemas.microsoft.com/office/powerpoint/2010/main" val="156684276"/>
+        <p14:creationId xmlns:p14="http://schemas.microsoft.com/office/powerpoint/2010/main" val="1274218895"/>
       </p:ext>
     </p:extLst>
   </p:cSld>
